--- a/video/StateBench_3_Minute_Deck.pptx
+++ b/video/StateBench_3_Minute_Deck.pptx
@@ -1,6 +1,6 @@
 
 <file path=ppt/presentation.xml><?xml version="1.0" encoding="utf-8"?>
-<p:presentation xmlns:a="http://schemas.openxmlformats.org/drawingml/2006/main" xmlns:r="http://schemas.openxmlformats.org/officeDocument/2006/relationships" xmlns:p="http://schemas.openxmlformats.org/presentationml/2006/main" removePersonalInfoOnSave="1">
+<p:presentation xmlns:a="http://schemas.openxmlformats.org/drawingml/2006/main" xmlns:r="http://schemas.openxmlformats.org/officeDocument/2006/relationships" xmlns:p="http://schemas.openxmlformats.org/presentationml/2006/main">
   <p:sldMasterIdLst>
     <p:sldMasterId id="2147483648" r:id="rId1"/>
   </p:sldMasterIdLst>
@@ -330,32 +330,7 @@
           <a:bodyPr/>
           <a:lstStyle/>
           <a:p>
-            <a:r>
-              <a:t>Opening slide. Introduce the benchmark problem and research question.</a:t>
-            </a:r>
-          </a:p>
-          <a:p>
-            <a:endParaRPr/>
-          </a:p>
-          <a:p>
-            <a:r>
-              <a:t>[Sources]</a:t>
-            </a:r>
-          </a:p>
-          <a:p>
-            <a:r>
-              <a:t>- https://arxiv.org/html/2509.26553v2</a:t>
-            </a:r>
-          </a:p>
-          <a:p>
-            <a:r>
-              <a:t>- Local: configs/final.yaml</a:t>
-            </a:r>
-          </a:p>
-          <a:p>
-            <a:r>
-              <a:t>[/Sources]</a:t>
-            </a:r>
+            <a:endParaRPr dirty="0"/>
           </a:p>
         </p:txBody>
       </p:sp>
@@ -430,27 +405,7 @@
           <a:bodyPr/>
           <a:lstStyle/>
           <a:p>
-            <a:r>
-              <a:t>Explain that nodes are single-output functions and edges represent typed dependencies. The benchmark hides the graph, so the model must infer a valid sequence while preserving intermediate values.</a:t>
-            </a:r>
-          </a:p>
-          <a:p>
-            <a:endParaRPr/>
-          </a:p>
-          <a:p>
-            <a:r>
-              <a:t>[Sources]</a:t>
-            </a:r>
-          </a:p>
-          <a:p>
-            <a:r>
-              <a:t>- https://arxiv.org/html/2509.26553v2</a:t>
-            </a:r>
-          </a:p>
-          <a:p>
-            <a:r>
-              <a:t>[/Sources]</a:t>
-            </a:r>
+            <a:endParaRPr dirty="0"/>
           </a:p>
         </p:txBody>
       </p:sp>
@@ -525,27 +480,7 @@
           <a:bodyPr/>
           <a:lstStyle/>
           <a:p>
-            <a:r>
-              <a:t>Describe the paper's controllable axes: dependency depth and irrelevant functions. Emphasize connected distractors because their type-compatible edges create convincing wrong routes.</a:t>
-            </a:r>
-          </a:p>
-          <a:p>
-            <a:endParaRPr/>
-          </a:p>
-          <a:p>
-            <a:r>
-              <a:t>[Sources]</a:t>
-            </a:r>
-          </a:p>
-          <a:p>
-            <a:r>
-              <a:t>- https://arxiv.org/html/2509.26553v2</a:t>
-            </a:r>
-          </a:p>
-          <a:p>
-            <a:r>
-              <a:t>[/Sources]</a:t>
-            </a:r>
+            <a:endParaRPr dirty="0"/>
           </a:p>
         </p:txBody>
       </p:sp>
@@ -620,37 +555,7 @@
           <a:bodyPr/>
           <a:lstStyle/>
           <a:p>
-            <a:r>
-              <a:t>Separate the partial paper-style reproduction from the final controlled extension. Explain that all state strategies receive the same compatible interface and frozen tasks, preserving the paired comparison.</a:t>
-            </a:r>
-          </a:p>
-          <a:p>
-            <a:endParaRPr/>
-          </a:p>
-          <a:p>
-            <a:r>
-              <a:t>[Sources]</a:t>
-            </a:r>
-          </a:p>
-          <a:p>
-            <a:r>
-              <a:t>- https://arxiv.org/html/2509.26553v2</a:t>
-            </a:r>
-          </a:p>
-          <a:p>
-            <a:r>
-              <a:t>- Local: configs/final.yaml</a:t>
-            </a:r>
-          </a:p>
-          <a:p>
-            <a:r>
-              <a:t>- Local: docs/METHODOLOGY.md</a:t>
-            </a:r>
-          </a:p>
-          <a:p>
-            <a:r>
-              <a:t>[/Sources]</a:t>
-            </a:r>
+            <a:endParaRPr dirty="0"/>
           </a:p>
         </p:txBody>
       </p:sp>
@@ -725,42 +630,7 @@
           <a:bodyPr/>
           <a:lstStyle/>
           <a:p>
-            <a:r>
-              <a:t>Walk through the condition-level success chart first, then the compact-state comparison. Stress that static pruning did not compress beyond JSON. Live pruning did compress, but lost two connected trials, so the conclusion is a trade-off rather than a win.</a:t>
-            </a:r>
-          </a:p>
-          <a:p>
-            <a:endParaRPr/>
-          </a:p>
-          <a:p>
-            <a:r>
-              <a:t>[Sources]</a:t>
-            </a:r>
-          </a:p>
-          <a:p>
-            <a:r>
-              <a:t>- Local: results/final/processed/strategy_summary.csv</a:t>
-            </a:r>
-          </a:p>
-          <a:p>
-            <a:r>
-              <a:t>- Local: results/final/processed/strategy_by_config.csv</a:t>
-            </a:r>
-          </a:p>
-          <a:p>
-            <a:r>
-              <a:t>- Local: results/final/figures/reliability_by_configuration.png</a:t>
-            </a:r>
-          </a:p>
-          <a:p>
-            <a:r>
-              <a:t>- Local: results/final/figures/live_pruning_comparison.png</a:t>
-            </a:r>
-          </a:p>
-          <a:p>
-            <a:r>
-              <a:t>[/Sources]</a:t>
-            </a:r>
+            <a:endParaRPr dirty="0"/>
           </a:p>
         </p:txBody>
       </p:sp>
@@ -835,37 +705,7 @@
           <a:bodyPr/>
           <a:lstStyle/>
           <a:p>
-            <a:r>
-              <a:t>Close with the qualified contribution and point to the final repository, report, and video deliverables. Do not claim that more reasoning tokens would necessarily repair the live-pruning failures.</a:t>
-            </a:r>
-          </a:p>
-          <a:p>
-            <a:endParaRPr/>
-          </a:p>
-          <a:p>
-            <a:r>
-              <a:t>[Sources]</a:t>
-            </a:r>
-          </a:p>
-          <a:p>
-            <a:r>
-              <a:t>- Local: report/StateBench_Report.docx</a:t>
-            </a:r>
-          </a:p>
-          <a:p>
-            <a:r>
-              <a:t>- Local: docs/RESULTS.md</a:t>
-            </a:r>
-          </a:p>
-          <a:p>
-            <a:r>
-              <a:t>- Local: README.md</a:t>
-            </a:r>
-          </a:p>
-          <a:p>
-            <a:r>
-              <a:t>[/Sources]</a:t>
-            </a:r>
+            <a:endParaRPr dirty="0"/>
           </a:p>
         </p:txBody>
       </p:sp>
@@ -1772,7 +1612,7 @@
         </p:nvSpPr>
         <p:spPr>
           <a:xfrm flipV="1">
-            <a:off x="7639050" y="3267075"/>
+            <a:off x="7505700" y="2813255"/>
             <a:ext cx="1200150" cy="762000"/>
           </a:xfrm>
           <a:prstGeom prst="line">
@@ -2171,7 +2011,7 @@
         </p:nvSpPr>
         <p:spPr>
           <a:xfrm>
-            <a:off x="7239000" y="3762375"/>
+            <a:off x="7029450" y="3403805"/>
             <a:ext cx="571500" cy="571500"/>
           </a:xfrm>
           <a:prstGeom prst="ellipse">
@@ -2204,7 +2044,7 @@
         </p:nvSpPr>
         <p:spPr>
           <a:xfrm>
-            <a:off x="7239000" y="3876675"/>
+            <a:off x="7029450" y="3580940"/>
             <a:ext cx="571500" cy="266700"/>
           </a:xfrm>
           <a:prstGeom prst="rect">
@@ -2218,7 +2058,7 @@
         </p:spPr>
         <p:txBody>
           <a:bodyPr anchor="t">
-            <a:normAutofit fontScale="90196"/>
+            <a:normAutofit fontScale="97696" lnSpcReduction="10000"/>
           </a:bodyPr>
           <a:lstStyle/>
           <a:p>
@@ -2234,7 +2074,7 @@
               </a:defRPr>
             </a:pPr>
             <a:r>
-              <a:rPr sz="1275" b="1">
+              <a:rPr sz="1275" b="1" dirty="0">
                 <a:solidFill>
                   <a:srgbClr val="183153"/>
                 </a:solidFill>
